--- a/Presentar prog2.pptx
+++ b/Presentar prog2.pptx
@@ -11,6 +11,7 @@
     <p:sldId id="259" r:id="rId5"/>
     <p:sldId id="260" r:id="rId6"/>
     <p:sldId id="261" r:id="rId7"/>
+    <p:sldId id="262" r:id="rId8"/>
   </p:sldIdLst>
   <p:sldSz cx="12192000" cy="6858000"/>
   <p:notesSz cx="6858000" cy="9144000"/>
@@ -109,6 +110,11 @@
       </a:defRPr>
     </a:lvl9pPr>
   </p:defaultTextStyle>
+  <p:extLst>
+    <p:ext uri="{EFAFB233-063F-42B5-8137-9DF3F51BA10A}">
+      <p15:sldGuideLst xmlns:p15="http://schemas.microsoft.com/office/powerpoint/2012/main"/>
+    </p:ext>
+  </p:extLst>
 </p:presentation>
 </file>
 
@@ -166,6 +172,13 @@
             <a:schemeClr val="lt1"/>
           </a:fontRef>
         </p:style>
+        <p:txBody>
+          <a:bodyPr/>
+          <a:lstStyle/>
+          <a:p>
+            <a:endParaRPr lang="es-CL"/>
+          </a:p>
+        </p:txBody>
       </p:sp>
       <p:sp>
         <p:nvSpPr>
@@ -206,6 +219,13 @@
             <a:schemeClr val="lt1"/>
           </a:fontRef>
         </p:style>
+        <p:txBody>
+          <a:bodyPr/>
+          <a:lstStyle/>
+          <a:p>
+            <a:endParaRPr lang="es-CL"/>
+          </a:p>
+        </p:txBody>
       </p:sp>
       <p:sp>
         <p:nvSpPr>
@@ -336,7 +356,7 @@
           <a:p>
             <a:fld id="{B32833CB-46CD-4AEE-B547-03986654B3C6}" type="datetimeFigureOut">
               <a:rPr lang="es-CL" smtClean="0"/>
-              <a:t>07-10-2026</a:t>
+              <a:t>13-10-2026</a:t>
             </a:fld>
             <a:endParaRPr lang="es-CL"/>
           </a:p>
@@ -506,7 +526,7 @@
           <a:p>
             <a:fld id="{B32833CB-46CD-4AEE-B547-03986654B3C6}" type="datetimeFigureOut">
               <a:rPr lang="es-CL" smtClean="0"/>
-              <a:t>07-10-2026</a:t>
+              <a:t>13-10-2026</a:t>
             </a:fld>
             <a:endParaRPr lang="es-CL"/>
           </a:p>
@@ -686,7 +706,7 @@
           <a:p>
             <a:fld id="{B32833CB-46CD-4AEE-B547-03986654B3C6}" type="datetimeFigureOut">
               <a:rPr lang="es-CL" smtClean="0"/>
-              <a:t>07-10-2026</a:t>
+              <a:t>13-10-2026</a:t>
             </a:fld>
             <a:endParaRPr lang="es-CL"/>
           </a:p>
@@ -856,7 +876,7 @@
           <a:p>
             <a:fld id="{B32833CB-46CD-4AEE-B547-03986654B3C6}" type="datetimeFigureOut">
               <a:rPr lang="es-CL" smtClean="0"/>
-              <a:t>07-10-2026</a:t>
+              <a:t>13-10-2026</a:t>
             </a:fld>
             <a:endParaRPr lang="es-CL"/>
           </a:p>
@@ -1114,7 +1134,7 @@
           <a:p>
             <a:fld id="{B32833CB-46CD-4AEE-B547-03986654B3C6}" type="datetimeFigureOut">
               <a:rPr lang="es-CL" smtClean="0"/>
-              <a:t>07-10-2026</a:t>
+              <a:t>13-10-2026</a:t>
             </a:fld>
             <a:endParaRPr lang="es-CL"/>
           </a:p>
@@ -1402,7 +1422,7 @@
           <a:p>
             <a:fld id="{B32833CB-46CD-4AEE-B547-03986654B3C6}" type="datetimeFigureOut">
               <a:rPr lang="es-CL" smtClean="0"/>
-              <a:t>07-10-2026</a:t>
+              <a:t>13-10-2026</a:t>
             </a:fld>
             <a:endParaRPr lang="es-CL"/>
           </a:p>
@@ -1844,7 +1864,7 @@
           <a:p>
             <a:fld id="{B32833CB-46CD-4AEE-B547-03986654B3C6}" type="datetimeFigureOut">
               <a:rPr lang="es-CL" smtClean="0"/>
-              <a:t>07-10-2026</a:t>
+              <a:t>13-10-2026</a:t>
             </a:fld>
             <a:endParaRPr lang="es-CL"/>
           </a:p>
@@ -1962,7 +1982,7 @@
           <a:p>
             <a:fld id="{B32833CB-46CD-4AEE-B547-03986654B3C6}" type="datetimeFigureOut">
               <a:rPr lang="es-CL" smtClean="0"/>
-              <a:t>07-10-2026</a:t>
+              <a:t>13-10-2026</a:t>
             </a:fld>
             <a:endParaRPr lang="es-CL"/>
           </a:p>
@@ -2057,7 +2077,7 @@
           <a:p>
             <a:fld id="{B32833CB-46CD-4AEE-B547-03986654B3C6}" type="datetimeFigureOut">
               <a:rPr lang="es-CL" smtClean="0"/>
-              <a:t>07-10-2026</a:t>
+              <a:t>13-10-2026</a:t>
             </a:fld>
             <a:endParaRPr lang="es-CL"/>
           </a:p>
@@ -2345,7 +2365,7 @@
           <a:p>
             <a:fld id="{B32833CB-46CD-4AEE-B547-03986654B3C6}" type="datetimeFigureOut">
               <a:rPr lang="es-CL" smtClean="0"/>
-              <a:t>07-10-2026</a:t>
+              <a:t>13-10-2026</a:t>
             </a:fld>
             <a:endParaRPr lang="es-CL"/>
           </a:p>
@@ -2614,7 +2634,7 @@
           <a:p>
             <a:fld id="{B32833CB-46CD-4AEE-B547-03986654B3C6}" type="datetimeFigureOut">
               <a:rPr lang="es-CL" smtClean="0"/>
-              <a:t>07-10-2026</a:t>
+              <a:t>13-10-2026</a:t>
             </a:fld>
             <a:endParaRPr lang="es-CL"/>
           </a:p>
@@ -2739,6 +2759,13 @@
             <a:schemeClr val="lt1"/>
           </a:fontRef>
         </p:style>
+        <p:txBody>
+          <a:bodyPr/>
+          <a:lstStyle/>
+          <a:p>
+            <a:endParaRPr lang="es-CL"/>
+          </a:p>
+        </p:txBody>
       </p:sp>
       <p:sp>
         <p:nvSpPr>
@@ -2812,6 +2839,13 @@
             <a:schemeClr val="lt1"/>
           </a:fontRef>
         </p:style>
+        <p:txBody>
+          <a:bodyPr/>
+          <a:lstStyle/>
+          <a:p>
+            <a:endParaRPr lang="es-CL"/>
+          </a:p>
+        </p:txBody>
       </p:sp>
       <p:sp>
         <p:nvSpPr>
@@ -2911,7 +2945,7 @@
           <a:p>
             <a:fld id="{B32833CB-46CD-4AEE-B547-03986654B3C6}" type="datetimeFigureOut">
               <a:rPr lang="es-CL" smtClean="0"/>
-              <a:t>07-10-2026</a:t>
+              <a:t>13-10-2026</a:t>
             </a:fld>
             <a:endParaRPr lang="es-CL"/>
           </a:p>
@@ -3465,13 +3499,13 @@
   <p:clrMapOvr>
     <a:masterClrMapping/>
   </p:clrMapOvr>
-  <mc:AlternateContent xmlns:mc="http://schemas.openxmlformats.org/markup-compatibility/2006">
-    <mc:Choice xmlns:p14="http://schemas.microsoft.com/office/powerpoint/2010/main" Requires="p14">
+  <mc:AlternateContent xmlns:mc="http://schemas.openxmlformats.org/markup-compatibility/2006" xmlns:p14="http://schemas.microsoft.com/office/powerpoint/2010/main">
+    <mc:Choice Requires="p14">
       <p:transition spd="med" p14:dur="700">
         <p:fade/>
       </p:transition>
     </mc:Choice>
-    <mc:Fallback>
+    <mc:Fallback xmlns="">
       <p:transition spd="med">
         <p:fade/>
       </p:transition>
@@ -4317,18 +4351,177 @@
   <p:clrMapOvr>
     <a:masterClrMapping/>
   </p:clrMapOvr>
-  <mc:AlternateContent xmlns:mc="http://schemas.openxmlformats.org/markup-compatibility/2006">
-    <mc:Choice xmlns:p14="http://schemas.microsoft.com/office/powerpoint/2010/main" Requires="p14">
+  <mc:AlternateContent xmlns:mc="http://schemas.openxmlformats.org/markup-compatibility/2006" xmlns:p14="http://schemas.microsoft.com/office/powerpoint/2010/main">
+    <mc:Choice Requires="p14">
       <p:transition spd="slow" p14:dur="3400">
         <p14:reveal/>
       </p:transition>
     </mc:Choice>
-    <mc:Fallback>
+    <mc:Fallback xmlns="">
       <p:transition spd="slow">
         <p:fade/>
       </p:transition>
     </mc:Fallback>
   </mc:AlternateContent>
+</p:sld>
+</file>
+
+<file path=ppt/slides/slide7.xml><?xml version="1.0" encoding="utf-8"?>
+<p:sld xmlns:a="http://schemas.openxmlformats.org/drawingml/2006/main" xmlns:r="http://schemas.openxmlformats.org/officeDocument/2006/relationships" xmlns:p="http://schemas.openxmlformats.org/presentationml/2006/main">
+  <p:cSld>
+    <p:spTree>
+      <p:nvGrpSpPr>
+        <p:cNvPr id="1" name=""/>
+        <p:cNvGrpSpPr/>
+        <p:nvPr/>
+      </p:nvGrpSpPr>
+      <p:grpSpPr>
+        <a:xfrm>
+          <a:off x="0" y="0"/>
+          <a:ext cx="0" cy="0"/>
+          <a:chOff x="0" y="0"/>
+          <a:chExt cx="0" cy="0"/>
+        </a:xfrm>
+      </p:grpSpPr>
+      <p:sp>
+        <p:nvSpPr>
+          <p:cNvPr id="2" name="Título 1">
+            <a:extLst>
+              <a:ext uri="{FF2B5EF4-FFF2-40B4-BE49-F238E27FC236}">
+                <a16:creationId xmlns:a16="http://schemas.microsoft.com/office/drawing/2014/main" id="{61A8D4D2-D3E1-2E27-0C44-B913A0278A19}"/>
+              </a:ext>
+            </a:extLst>
+          </p:cNvPr>
+          <p:cNvSpPr>
+            <a:spLocks noGrp="1"/>
+          </p:cNvSpPr>
+          <p:nvPr>
+            <p:ph type="title"/>
+          </p:nvPr>
+        </p:nvSpPr>
+        <p:spPr/>
+        <p:txBody>
+          <a:bodyPr/>
+          <a:lstStyle/>
+          <a:p>
+            <a:r>
+              <a:rPr lang="es-CL" dirty="0"/>
+              <a:t>Alternativa</a:t>
+            </a:r>
+          </a:p>
+        </p:txBody>
+      </p:sp>
+      <p:sp>
+        <p:nvSpPr>
+          <p:cNvPr id="3" name="Marcador de contenido 2">
+            <a:extLst>
+              <a:ext uri="{FF2B5EF4-FFF2-40B4-BE49-F238E27FC236}">
+                <a16:creationId xmlns:a16="http://schemas.microsoft.com/office/drawing/2014/main" id="{96BD1D6B-BB48-3FE0-211B-3602290D0555}"/>
+              </a:ext>
+            </a:extLst>
+          </p:cNvPr>
+          <p:cNvSpPr>
+            <a:spLocks noGrp="1"/>
+          </p:cNvSpPr>
+          <p:nvPr>
+            <p:ph idx="1"/>
+          </p:nvPr>
+        </p:nvSpPr>
+        <p:spPr>
+          <a:xfrm>
+            <a:off x="3869268" y="864108"/>
+            <a:ext cx="4733958" cy="5120640"/>
+          </a:xfrm>
+        </p:spPr>
+        <p:txBody>
+          <a:bodyPr/>
+          <a:lstStyle/>
+          <a:p>
+            <a:r>
+              <a:rPr lang="es-CL" dirty="0" err="1"/>
+              <a:t>Cloudflare</a:t>
+            </a:r>
+            <a:r>
+              <a:rPr lang="es-CL" dirty="0"/>
+              <a:t> </a:t>
+            </a:r>
+            <a:r>
+              <a:rPr lang="es-CL" dirty="0" err="1"/>
+              <a:t>zero</a:t>
+            </a:r>
+            <a:r>
+              <a:rPr lang="es-CL" dirty="0"/>
+              <a:t> trust en su capa gratuita otorga la capacidad de generar un túnel de manera gratuita teniendo un dominio</a:t>
+            </a:r>
+          </a:p>
+          <a:p>
+            <a:r>
+              <a:rPr lang="es-CL" dirty="0"/>
+              <a:t>La base de datos aun seria requerida para un correcto uso</a:t>
+            </a:r>
+          </a:p>
+          <a:p>
+            <a:r>
+              <a:rPr lang="es-CL" dirty="0"/>
+              <a:t>Valor del dominio $10USD aproximadamente anual en NIC</a:t>
+            </a:r>
+          </a:p>
+          <a:p>
+            <a:r>
+              <a:rPr lang="es-CL" dirty="0"/>
+              <a:t>Base de datos $25 USD mensual por </a:t>
+            </a:r>
+            <a:r>
+              <a:rPr lang="es-CL" dirty="0" err="1"/>
+              <a:t>Supabase</a:t>
+            </a:r>
+            <a:r>
+              <a:rPr lang="es-CL" dirty="0"/>
+              <a:t> con la opción de encontrar una opción mas barata con el espacio necesario para guardar tantas imágenes</a:t>
+            </a:r>
+          </a:p>
+        </p:txBody>
+      </p:sp>
+      <p:pic>
+        <p:nvPicPr>
+          <p:cNvPr id="4" name="Imagen 3" descr="Cloudflare - Apps Documentation">
+            <a:extLst>
+              <a:ext uri="{FF2B5EF4-FFF2-40B4-BE49-F238E27FC236}">
+                <a16:creationId xmlns:a16="http://schemas.microsoft.com/office/drawing/2014/main" id="{0799C7C2-1EF3-0D65-38D6-2B29BCFA65BE}"/>
+              </a:ext>
+            </a:extLst>
+          </p:cNvPr>
+          <p:cNvPicPr>
+            <a:picLocks noChangeAspect="1"/>
+          </p:cNvPicPr>
+          <p:nvPr/>
+        </p:nvPicPr>
+        <p:blipFill>
+          <a:blip r:embed="rId2"/>
+          <a:stretch>
+            <a:fillRect/>
+          </a:stretch>
+        </p:blipFill>
+        <p:spPr>
+          <a:xfrm>
+            <a:off x="8603226" y="1703598"/>
+            <a:ext cx="3121423" cy="3121423"/>
+          </a:xfrm>
+          <a:prstGeom prst="rect">
+            <a:avLst/>
+          </a:prstGeom>
+        </p:spPr>
+      </p:pic>
+    </p:spTree>
+    <p:extLst>
+      <p:ext uri="{BB962C8B-B14F-4D97-AF65-F5344CB8AC3E}">
+        <p14:creationId xmlns:p14="http://schemas.microsoft.com/office/powerpoint/2010/main" val="1527128046"/>
+      </p:ext>
+    </p:extLst>
+  </p:cSld>
+  <p:clrMapOvr>
+    <a:masterClrMapping/>
+  </p:clrMapOvr>
 </p:sld>
 </file>
 
